--- a/Topic_B/Exam_Practice/TB-L11_Writing_Workshop_Topic_B_Speaking_and_Writing_Workshop.pptx
+++ b/Topic_B/Exam_Practice/TB-L11_Writing_Workshop_Topic_B_Speaking_and_Writing_Workshop.pptx
@@ -784,7 +784,11 @@
           <a:lstStyle/>
           <a:p>
             <a:r>
-              <a:rPr lang="en-US" dirty="0"/>
+              <a:rPr lang="ar-SA" dirty="0">
+                <a:latin typeface="Amiri" pitchFamily="2" charset="-78"/>
+                <a:ea typeface="Amiri" pitchFamily="2" charset="-78"/>
+                <a:cs typeface="Amiri" pitchFamily="2" charset="-78"/>
+              </a:rPr>
               <a:t>Q3 (3 min to choose and read). Title (أ) suits Core and Develop; title (ب) suits Stretch.</a:t>
             </a:r>
             <a:endParaRPr lang="en-US" dirty="0"/>
@@ -1403,7 +1407,11 @@
           <a:lstStyle/>
           <a:p>
             <a:r>
-              <a:rPr lang="en-US" dirty="0"/>
+              <a:rPr lang="ar-SA" dirty="0">
+                <a:latin typeface="Amiri" pitchFamily="2" charset="-78"/>
+                <a:ea typeface="Amiri" pitchFamily="2" charset="-78"/>
+                <a:cs typeface="Amiri" pitchFamily="2" charset="-78"/>
+              </a:rPr>
               <a:t>WELCOME (1 min) — while students join.
 • Greet each student by name as they arrive: السَّلَامُ عَلَيْكُمْ. Take the register (Pastoral Tracker: attendance 0/1).
 • 2-MINUTE CHECK-IN (SEND training): a private chat to any student who seemed unsettled last lesson — “Are you okay today? 👍 / 👎”.
@@ -1936,7 +1944,11 @@
           <a:lstStyle/>
           <a:p>
             <a:r>
-              <a:rPr lang="en-US" dirty="0"/>
+              <a:rPr lang="ar-SA" dirty="0">
+                <a:latin typeface="Amiri" pitchFamily="2" charset="-78"/>
+                <a:ea typeface="Amiri" pitchFamily="2" charset="-78"/>
+                <a:cs typeface="Amiri" pitchFamily="2" charset="-78"/>
+              </a:rPr>
               <a:t>Question words: عَرِّفِي (introduce) · صِفِي (describe) · مَا (what) · مَاذَا (what) — bullet 3 is PAST, bullet 4 is an idhā + FUTURE sentence.</a:t>
             </a:r>
             <a:endParaRPr lang="en-US" dirty="0"/>
@@ -2508,6 +2520,7 @@
                   <a:srgbClr val="D4AF37"/>
                 </a:solidFill>
                 <a:latin typeface="Amiri" pitchFamily="2" charset="-78"/>
+                <a:ea typeface="Amiri" pitchFamily="2" charset="-78"/>
                 <a:cs typeface="Amiri" pitchFamily="2" charset="-78"/>
               </a:rPr>
               <a:t>م</a:t>
@@ -2714,6 +2727,7 @@
                   <a:srgbClr val="D4AF37"/>
                 </a:solidFill>
                 <a:latin typeface="Amiri" pitchFamily="2" charset="-78"/>
+                <a:ea typeface="Amiri" pitchFamily="2" charset="-78"/>
                 <a:cs typeface="Amiri" pitchFamily="2" charset="-78"/>
               </a:rPr>
               <a:t>وَرْشَةُ الكِتَابَةِ — هٰذَا أَنَا</a:t>
@@ -3171,6 +3185,7 @@
                   <a:srgbClr val="D4AF37"/>
                 </a:solidFill>
                 <a:latin typeface="Amiri" pitchFamily="2" charset="-78"/>
+                <a:ea typeface="Amiri" pitchFamily="2" charset="-78"/>
                 <a:cs typeface="Amiri" pitchFamily="2" charset="-78"/>
               </a:rPr>
               <a:t>م</a:t>
@@ -3491,6 +3506,7 @@
                   <a:srgbClr val="8A6D1E"/>
                 </a:solidFill>
                 <a:latin typeface="Amiri" pitchFamily="2" charset="-78"/>
+                <a:ea typeface="Amiri" pitchFamily="2" charset="-78"/>
                 <a:cs typeface="Amiri" pitchFamily="2" charset="-78"/>
               </a:rPr>
               <a:t>نَمُوذَجُ الإِجَابَةِ</a:t>
@@ -3604,6 +3620,7 @@
                   <a:srgbClr val="1F2A37"/>
                 </a:solidFill>
                 <a:latin typeface="Amiri" pitchFamily="2" charset="-78"/>
+                <a:ea typeface="Amiri" pitchFamily="2" charset="-78"/>
                 <a:cs typeface="Amiri" pitchFamily="2" charset="-78"/>
               </a:rPr>
               <a:t>السَّلَامُ عَلَيْكُمْ،</a:t>
@@ -3623,6 +3640,7 @@
                   <a:srgbClr val="1F2A37"/>
                 </a:solidFill>
                 <a:latin typeface="Amiri" pitchFamily="2" charset="-78"/>
+                <a:ea typeface="Amiri" pitchFamily="2" charset="-78"/>
                 <a:cs typeface="Amiri" pitchFamily="2" charset="-78"/>
               </a:rPr>
               <a:t>اسْمِي رِيمُ، وَعُمْرِي سِتَّ عَشْرَةَ سَنَةً، وَأَسْكُنُ فِي لَنْدَنَ مَعَ أُسْرَتِي. أَبِي طَبِيبٌ، وَأُمِّي مُعَلِّمَةٌ، وَعِنْدِي أَخٌ صَغِيرٌ. أَنَا طَالِبَةٌ مَرِحَةٌ وَمُنَظَّمَةٌ، وَأُحِبُّ الرَّسْمَ وَالسِّبَاحَةَ. أَسْبَحُ ثَلَاثَ مَرَّاتٍ فِي الأُسْبُوعِ. فِي الصَّيْفِ المَاضِي سَافَرْتُ إِلَى المَغْرِبِ، وَتَكَلَّمْتُ العَرَبِيَّةَ مَعَ النَّاسِ، لِذٰلِكَ أُرِيدُ أَنْ أُشَارِكَ فِي البَرْنَامَجِ. إِذَا قَبِلْتُمُونِي، سَأُحَسِّنُ لُغَتِي وَسَأَتَعَرَّفُ عَلَى ثَقَافَةٍ جَدِيدَةٍ.</a:t>
@@ -3642,6 +3660,7 @@
                   <a:srgbClr val="1F2A37"/>
                 </a:solidFill>
                 <a:latin typeface="Amiri" pitchFamily="2" charset="-78"/>
+                <a:ea typeface="Amiri" pitchFamily="2" charset="-78"/>
                 <a:cs typeface="Amiri" pitchFamily="2" charset="-78"/>
               </a:rPr>
               <a:t>مَعَ الشُّكْرِ،</a:t>
@@ -3661,6 +3680,7 @@
                   <a:srgbClr val="1F2A37"/>
                 </a:solidFill>
                 <a:latin typeface="Amiri" pitchFamily="2" charset="-78"/>
+                <a:ea typeface="Amiri" pitchFamily="2" charset="-78"/>
                 <a:cs typeface="Amiri" pitchFamily="2" charset="-78"/>
               </a:rPr>
               <a:t>رِيمُ</a:t>
@@ -3824,11 +3844,12 @@
               <a:buNone/>
             </a:pPr>
             <a:r>
-              <a:rPr lang="en-US" sz="950" b="1" dirty="0">
+              <a:rPr lang="ar-SA" sz="950" b="1" dirty="0">
                 <a:solidFill>
                   <a:srgbClr val="FFFFFF"/>
                 </a:solidFill>
                 <a:latin typeface="Calibri" pitchFamily="34" charset="0"/>
+                <a:ea typeface="Amiri" pitchFamily="2" charset="-78"/>
                 <a:cs typeface="Amiri" pitchFamily="2" charset="-78"/>
               </a:rPr>
               <a:t>أَسْكُنُ فِي لَنْدَنَ مَعَ</a:t>
@@ -3889,11 +3910,12 @@
               <a:buNone/>
             </a:pPr>
             <a:r>
-              <a:rPr lang="en-US" sz="950" b="1" dirty="0">
+              <a:rPr lang="ar-SA" sz="950" b="1" dirty="0">
                 <a:solidFill>
                   <a:srgbClr val="FFFFFF"/>
                 </a:solidFill>
                 <a:latin typeface="Calibri" pitchFamily="34" charset="0"/>
+                <a:ea typeface="Amiri" pitchFamily="2" charset="-78"/>
                 <a:cs typeface="Amiri" pitchFamily="2" charset="-78"/>
               </a:rPr>
               <a:t>مَرِحَةٌ وَمُنَظَّمَةٌ</a:t>
@@ -3954,11 +3976,12 @@
               <a:buNone/>
             </a:pPr>
             <a:r>
-              <a:rPr lang="en-US" sz="950" b="1" dirty="0">
+              <a:rPr lang="ar-SA" sz="950" b="1" dirty="0">
                 <a:solidFill>
                   <a:srgbClr val="FFFFFF"/>
                 </a:solidFill>
                 <a:latin typeface="Calibri" pitchFamily="34" charset="0"/>
+                <a:ea typeface="Amiri" pitchFamily="2" charset="-78"/>
                 <a:cs typeface="Amiri" pitchFamily="2" charset="-78"/>
               </a:rPr>
               <a:t>لِذٰلِكَ</a:t>
@@ -4019,11 +4042,12 @@
               <a:buNone/>
             </a:pPr>
             <a:r>
-              <a:rPr lang="en-US" sz="950" b="1" dirty="0">
+              <a:rPr lang="ar-SA" sz="950" b="1" dirty="0">
                 <a:solidFill>
                   <a:srgbClr val="FFFFFF"/>
                 </a:solidFill>
                 <a:latin typeface="Calibri" pitchFamily="34" charset="0"/>
+                <a:ea typeface="Amiri" pitchFamily="2" charset="-78"/>
                 <a:cs typeface="Amiri" pitchFamily="2" charset="-78"/>
               </a:rPr>
               <a:t>إِذَا قَبِلْتُمُونِي، سَأُحَسِّنُ</a:t>
@@ -4157,6 +4181,7 @@
                   <a:srgbClr val="D4AF37"/>
                 </a:solidFill>
                 <a:latin typeface="Amiri" pitchFamily="2" charset="-78"/>
+                <a:ea typeface="Amiri" pitchFamily="2" charset="-78"/>
                 <a:cs typeface="Amiri" pitchFamily="2" charset="-78"/>
               </a:rPr>
               <a:t>م</a:t>
@@ -4477,6 +4502,7 @@
                   <a:srgbClr val="8A6D1E"/>
                 </a:solidFill>
                 <a:latin typeface="Amiri" pitchFamily="2" charset="-78"/>
+                <a:ea typeface="Amiri" pitchFamily="2" charset="-78"/>
                 <a:cs typeface="Amiri" pitchFamily="2" charset="-78"/>
               </a:rPr>
               <a:t>نَمُوذَجُ الإِجَابَةِ</a:t>
@@ -4590,6 +4616,7 @@
                   <a:srgbClr val="1F2A37"/>
                 </a:solidFill>
                 <a:latin typeface="Amiri" pitchFamily="2" charset="-78"/>
+                <a:ea typeface="Amiri" pitchFamily="2" charset="-78"/>
                 <a:cs typeface="Amiri" pitchFamily="2" charset="-78"/>
               </a:rPr>
               <a:t>السَّلَامُ عَلَيْكُمْ وَرَحْمَةُ اللّٰهِ،</a:t>
@@ -4609,6 +4636,7 @@
                   <a:srgbClr val="1F2A37"/>
                 </a:solidFill>
                 <a:latin typeface="Amiri" pitchFamily="2" charset="-78"/>
+                <a:ea typeface="Amiri" pitchFamily="2" charset="-78"/>
                 <a:cs typeface="Amiri" pitchFamily="2" charset="-78"/>
               </a:rPr>
               <a:t>اسْمِي رِيمُ أَحْمَدُ، وَعُمْرِي سِتَّ عَشْرَةَ سَنَةً، وَأَسْكُنُ فِي حَيٍّ مُتَنَوِّعٍ فِي شَرْقِ لَنْدَنَ مَعَ وَالِدَيَّ وَأَخِيَ الصَّغِيرِ. يَصِفُنِي أَصْدِقَائِي بِأَنِّي مَرِحَةٌ وَمُنَظَّمَةٌ، كَمَا أَنِّي أُحِبُّ العَمَلَ فِي فَرِيقٍ. أَقْضِي وَقْتَ فَرَاغِي فِي الرَّسْمِ وَالسِّبَاحَةِ، وَبِالإِضَافَةِ إِلَى ذٰلِكَ أَتَطَوَّعُ فِي مَكْتَبَةِ الحَيِّ يَوْمَ السَّبْتِ. فِي الصَّيْفِ المَاضِي زُرْتُ المَغْرِبَ، فَاكْتَشَفْتُ أَنَّ عَرَبِيَّتِي تَكْفِي لِلتَّسَوُّقِ، لٰكِنَّهَا لَا تَكْفِي لِلْحِوَارِ الحَقِيقِيِّ، وَلِذٰلِكَ أَتَقَدَّمُ لِهٰذَا البَرْنَامَجِ. إِذَا قَبِلْتُمُونِي، فَسَأَكُونُ ضَيْفَةً مُحْتَرِمَةً، وَسَأُشَارِكُ أُسْرَتِيَ المُضِيفَةَ فِي كُلِّ أَنْشِطَتِهَا.</a:t>
@@ -4628,6 +4656,7 @@
                   <a:srgbClr val="1F2A37"/>
                 </a:solidFill>
                 <a:latin typeface="Amiri" pitchFamily="2" charset="-78"/>
+                <a:ea typeface="Amiri" pitchFamily="2" charset="-78"/>
                 <a:cs typeface="Amiri" pitchFamily="2" charset="-78"/>
               </a:rPr>
               <a:t>مَعَ خَالِصِ الشُّكْرِ،</a:t>
@@ -4647,6 +4676,7 @@
                   <a:srgbClr val="1F2A37"/>
                 </a:solidFill>
                 <a:latin typeface="Amiri" pitchFamily="2" charset="-78"/>
+                <a:ea typeface="Amiri" pitchFamily="2" charset="-78"/>
                 <a:cs typeface="Amiri" pitchFamily="2" charset="-78"/>
               </a:rPr>
               <a:t>رِيمُ أَحْمَدُ</a:t>
@@ -4810,11 +4840,12 @@
               <a:buNone/>
             </a:pPr>
             <a:r>
-              <a:rPr lang="en-US" sz="950" b="1" dirty="0">
+              <a:rPr lang="ar-SA" sz="950" b="1" dirty="0">
                 <a:solidFill>
                   <a:srgbClr val="FFFFFF"/>
                 </a:solidFill>
                 <a:latin typeface="Calibri" pitchFamily="34" charset="0"/>
+                <a:ea typeface="Amiri" pitchFamily="2" charset="-78"/>
                 <a:cs typeface="Amiri" pitchFamily="2" charset="-78"/>
               </a:rPr>
               <a:t>يَصِفُنِي أَصْدِقَائِي بِأَنِّي</a:t>
@@ -4875,11 +4906,12 @@
               <a:buNone/>
             </a:pPr>
             <a:r>
-              <a:rPr lang="en-US" sz="950" b="1" dirty="0">
+              <a:rPr lang="ar-SA" sz="950" b="1" dirty="0">
                 <a:solidFill>
                   <a:srgbClr val="FFFFFF"/>
                 </a:solidFill>
                 <a:latin typeface="Calibri" pitchFamily="34" charset="0"/>
+                <a:ea typeface="Amiri" pitchFamily="2" charset="-78"/>
                 <a:cs typeface="Amiri" pitchFamily="2" charset="-78"/>
               </a:rPr>
               <a:t>بِالإِضَافَةِ إِلَى ذٰلِكَ</a:t>
@@ -4940,11 +4972,12 @@
               <a:buNone/>
             </a:pPr>
             <a:r>
-              <a:rPr lang="en-US" sz="950" b="1" dirty="0">
+              <a:rPr lang="ar-SA" sz="950" b="1" dirty="0">
                 <a:solidFill>
                   <a:srgbClr val="FFFFFF"/>
                 </a:solidFill>
                 <a:latin typeface="Calibri" pitchFamily="34" charset="0"/>
+                <a:ea typeface="Amiri" pitchFamily="2" charset="-78"/>
                 <a:cs typeface="Amiri" pitchFamily="2" charset="-78"/>
               </a:rPr>
               <a:t>لٰكِنَّهَا لَا تَكْفِي … وَلِذٰلِكَ</a:t>
@@ -5005,11 +5038,12 @@
               <a:buNone/>
             </a:pPr>
             <a:r>
-              <a:rPr lang="en-US" sz="950" b="1" dirty="0">
+              <a:rPr lang="ar-SA" sz="950" b="1" dirty="0">
                 <a:solidFill>
                   <a:srgbClr val="FFFFFF"/>
                 </a:solidFill>
                 <a:latin typeface="Calibri" pitchFamily="34" charset="0"/>
+                <a:ea typeface="Amiri" pitchFamily="2" charset="-78"/>
                 <a:cs typeface="Amiri" pitchFamily="2" charset="-78"/>
               </a:rPr>
               <a:t>إِذَا قَبِلْتُمُونِي، فَسَأَكُونُ</a:t>
@@ -5143,6 +5177,7 @@
                   <a:srgbClr val="D4AF37"/>
                 </a:solidFill>
                 <a:latin typeface="Amiri" pitchFamily="2" charset="-78"/>
+                <a:ea typeface="Amiri" pitchFamily="2" charset="-78"/>
                 <a:cs typeface="Amiri" pitchFamily="2" charset="-78"/>
               </a:rPr>
               <a:t>م</a:t>
@@ -5463,6 +5498,7 @@
                   <a:srgbClr val="8A6D1E"/>
                 </a:solidFill>
                 <a:latin typeface="Amiri" pitchFamily="2" charset="-78"/>
+                <a:ea typeface="Amiri" pitchFamily="2" charset="-78"/>
                 <a:cs typeface="Amiri" pitchFamily="2" charset="-78"/>
               </a:rPr>
               <a:t>اخْتَرْ عُنْوَانًا وَاحِدًا</a:t>
@@ -5743,6 +5779,7 @@
                   <a:srgbClr val="1B3B6F"/>
                 </a:solidFill>
                 <a:latin typeface="Amiri" pitchFamily="2" charset="-78"/>
+                <a:ea typeface="Amiri" pitchFamily="2" charset="-78"/>
                 <a:cs typeface="Amiri" pitchFamily="2" charset="-78"/>
               </a:rPr>
               <a:t>هٰذَا أَنَا</a:t>
@@ -5781,6 +5818,7 @@
                   <a:srgbClr val="1B3B6F"/>
                 </a:solidFill>
                 <a:latin typeface="Amiri" pitchFamily="2" charset="-78"/>
+                <a:ea typeface="Amiri" pitchFamily="2" charset="-78"/>
                 <a:cs typeface="Amiri" pitchFamily="2" charset="-78"/>
               </a:rPr>
               <a:t>(أ)</a:t>
@@ -5887,6 +5925,7 @@
                   <a:srgbClr val="1B3B6F"/>
                 </a:solidFill>
                 <a:latin typeface="Amiri" pitchFamily="2" charset="-78"/>
+                <a:ea typeface="Amiri" pitchFamily="2" charset="-78"/>
                 <a:cs typeface="Amiri" pitchFamily="2" charset="-78"/>
               </a:rPr>
               <a:t>مَعْلُومَاتُكَ وَشَكْلُكَ وَشَخْصِيَّتُكَ · بَيْتُكَ وَأُسْرَتُكَ وَهِوَايَاتُكَ · تَجْرِبَةٌ غَيَّرَتْكَ · أَحْلَامُكَ لِلْمُسْتَقْبَلِ</a:t>
@@ -6018,6 +6057,7 @@
                   <a:srgbClr val="1B3B6F"/>
                 </a:solidFill>
                 <a:latin typeface="Amiri" pitchFamily="2" charset="-78"/>
+                <a:ea typeface="Amiri" pitchFamily="2" charset="-78"/>
                 <a:cs typeface="Amiri" pitchFamily="2" charset="-78"/>
               </a:rPr>
               <a:t>أَنْ تَكْبُرَ اليَوْمَ</a:t>
@@ -6056,6 +6096,7 @@
                   <a:srgbClr val="1B3B6F"/>
                 </a:solidFill>
                 <a:latin typeface="Amiri" pitchFamily="2" charset="-78"/>
+                <a:ea typeface="Amiri" pitchFamily="2" charset="-78"/>
                 <a:cs typeface="Amiri" pitchFamily="2" charset="-78"/>
               </a:rPr>
               <a:t>(ب)</a:t>
@@ -6162,6 +6203,7 @@
                   <a:srgbClr val="1B3B6F"/>
                 </a:solidFill>
                 <a:latin typeface="Amiri" pitchFamily="2" charset="-78"/>
+                <a:ea typeface="Amiri" pitchFamily="2" charset="-78"/>
                 <a:cs typeface="Amiri" pitchFamily="2" charset="-78"/>
               </a:rPr>
               <a:t>كَيْفَ يَعِيشُ الشَّبَابُ اليَوْمَ؟ · المَاضِي وَالحَاضِرُ · تَجْرِبَةٌ شَخْصِيَّةٌ · رَأْيُكَ وَاقْتِرَاحُكَ</a:t>
@@ -6361,6 +6403,7 @@
                   <a:srgbClr val="D4AF37"/>
                 </a:solidFill>
                 <a:latin typeface="Amiri" pitchFamily="2" charset="-78"/>
+                <a:ea typeface="Amiri" pitchFamily="2" charset="-78"/>
                 <a:cs typeface="Amiri" pitchFamily="2" charset="-78"/>
               </a:rPr>
               <a:t>م</a:t>
@@ -6681,6 +6724,7 @@
                   <a:srgbClr val="8A6D1E"/>
                 </a:solidFill>
                 <a:latin typeface="Amiri" pitchFamily="2" charset="-78"/>
+                <a:ea typeface="Amiri" pitchFamily="2" charset="-78"/>
                 <a:cs typeface="Amiri" pitchFamily="2" charset="-78"/>
               </a:rPr>
               <a:t>خُطَّةُ الكِتَابَةِ</a:t>
@@ -7305,6 +7349,7 @@
                   <a:srgbClr val="1B3B6F"/>
                 </a:solidFill>
                 <a:latin typeface="Amiri" pitchFamily="2" charset="-78"/>
+                <a:ea typeface="Amiri" pitchFamily="2" charset="-78"/>
                 <a:cs typeface="Amiri" pitchFamily="2" charset="-78"/>
               </a:rPr>
               <a:t>أَنَا هَادِئٌ، لٰكِنِّي مَرِحٌ مَعَ أَصْدِقَائِي.</a:t>
@@ -7404,6 +7449,7 @@
                   <a:srgbClr val="1B3B6F"/>
                 </a:solidFill>
                 <a:latin typeface="Amiri" pitchFamily="2" charset="-78"/>
+                <a:ea typeface="Amiri" pitchFamily="2" charset="-78"/>
                 <a:cs typeface="Amiri" pitchFamily="2" charset="-78"/>
               </a:rPr>
               <a:t>عِنْدَمَا كُنْتُ صَغِيرًا، كُنْتُ خَجُولًا جِدًّا.</a:t>
@@ -7503,6 +7549,7 @@
                   <a:srgbClr val="1B3B6F"/>
                 </a:solidFill>
                 <a:latin typeface="Amiri" pitchFamily="2" charset="-78"/>
+                <a:ea typeface="Amiri" pitchFamily="2" charset="-78"/>
                 <a:cs typeface="Amiri" pitchFamily="2" charset="-78"/>
               </a:rPr>
               <a:t>سَأَفْتَحُ مَطْعَمًا مِصْرِيًّا فِي لَنْدَنَ.</a:t>
@@ -7664,6 +7711,7 @@
                   <a:srgbClr val="1F2A37"/>
                 </a:solidFill>
                 <a:latin typeface="Amiri" pitchFamily="2" charset="-78"/>
+                <a:ea typeface="Amiri" pitchFamily="2" charset="-78"/>
                 <a:cs typeface="Amiri" pitchFamily="2" charset="-78"/>
               </a:rPr>
               <a:t>أ</a:t>
@@ -7690,6 +7738,7 @@
                   <a:srgbClr val="1F2A37"/>
                 </a:solidFill>
                 <a:latin typeface="Amiri" pitchFamily="2" charset="-78"/>
+                <a:ea typeface="Amiri" pitchFamily="2" charset="-78"/>
                 <a:cs typeface="Amiri" pitchFamily="2" charset="-78"/>
               </a:rPr>
               <a:t>ب</a:t>
@@ -7836,6 +7885,7 @@
                   <a:srgbClr val="D4AF37"/>
                 </a:solidFill>
                 <a:latin typeface="Amiri" pitchFamily="2" charset="-78"/>
+                <a:ea typeface="Amiri" pitchFamily="2" charset="-78"/>
                 <a:cs typeface="Amiri" pitchFamily="2" charset="-78"/>
               </a:rPr>
               <a:t>م</a:t>
@@ -8093,6 +8143,7 @@
                   <a:srgbClr val="8A6D1E"/>
                 </a:solidFill>
                 <a:latin typeface="Amiri" pitchFamily="2" charset="-78"/>
+                <a:ea typeface="Amiri" pitchFamily="2" charset="-78"/>
                 <a:cs typeface="Amiri" pitchFamily="2" charset="-78"/>
               </a:rPr>
               <a:t>أ</a:t>
@@ -8157,6 +8208,7 @@
                   <a:srgbClr val="1B3B6F"/>
                 </a:solidFill>
                 <a:latin typeface="Amiri" pitchFamily="2" charset="-78"/>
+                <a:ea typeface="Amiri" pitchFamily="2" charset="-78"/>
                 <a:cs typeface="Amiri" pitchFamily="2" charset="-78"/>
               </a:rPr>
               <a:t>أ</a:t>
@@ -8208,6 +8260,7 @@
                   <a:srgbClr val="8A6D1E"/>
                 </a:solidFill>
                 <a:latin typeface="Amiri" pitchFamily="2" charset="-78"/>
+                <a:ea typeface="Amiri" pitchFamily="2" charset="-78"/>
                 <a:cs typeface="Amiri" pitchFamily="2" charset="-78"/>
               </a:rPr>
               <a:t>نَمُوذَجُ الإِجَابَةِ</a:t>
@@ -8321,6 +8374,7 @@
                   <a:srgbClr val="1F2A37"/>
                 </a:solidFill>
                 <a:latin typeface="Amiri" pitchFamily="2" charset="-78"/>
+                <a:ea typeface="Amiri" pitchFamily="2" charset="-78"/>
                 <a:cs typeface="Amiri" pitchFamily="2" charset="-78"/>
               </a:rPr>
               <a:t>اسْمِي عُمَرُ، وَعُمْرِي خَمْسَ عَشْرَةَ سَنَةً. وُلِدْتُ فِي القَاهِرَةِ، لٰكِنِّي أَسْكُنُ فِي بَرْمِنْغْهَامَ مُنْذُ عَشْرِ سَنَوَاتٍ. أَنَا طَوِيلٌ وَنَحِيفٌ، وَشَعْرِي أَسْوَدُ، وَعَيْنَايَ بُنِّيَّتَانِ. أَنَا هَادِئٌ وَمُجْتَهِدٌ، لٰكِنِّي مَرِحٌ مَعَ أَصْدِقَائِي.</a:t>
@@ -8340,6 +8394,7 @@
                   <a:srgbClr val="1F2A37"/>
                 </a:solidFill>
                 <a:latin typeface="Amiri" pitchFamily="2" charset="-78"/>
+                <a:ea typeface="Amiri" pitchFamily="2" charset="-78"/>
                 <a:cs typeface="Amiri" pitchFamily="2" charset="-78"/>
               </a:rPr>
               <a:t>أَسْكُنُ مَعَ أُسْرَتِي فِي بَيْتٍ صَغِيرٍ، فِيهِ ثَلَاثُ غُرَفِ نَوْمٍ. أُشَارِكُ غُرْفَتِي مَعَ أَخِي الصَّغِيرِ. غُرْفَتُنَا زَرْقَاءُ، وَفِيهَا سَرِيرَانِ وَمَكْتَبٌ. أَمَّا هِوَايَاتِي فَهِيَ كُرَةُ القَدَمِ وَالطَّبْخُ، وَأَلْعَبُ مَعَ فَرِيقِ المَدْرَسَةِ مَرَّتَيْنِ فِي الأُسْبُوعِ.</a:t>
@@ -8359,6 +8414,7 @@
                   <a:srgbClr val="1F2A37"/>
                 </a:solidFill>
                 <a:latin typeface="Amiri" pitchFamily="2" charset="-78"/>
+                <a:ea typeface="Amiri" pitchFamily="2" charset="-78"/>
                 <a:cs typeface="Amiri" pitchFamily="2" charset="-78"/>
               </a:rPr>
               <a:t>عِنْدَمَا كُنْتُ صَغِيرًا، كُنْتُ خَجُولًا جِدًّا. فِي السَّنَةِ المَاضِيَةِ انْضَمَمْتُ إِلَى نَادِي المَسْرَحِ، وَمَثَّلْتُ فِي مَسْرَحِيَّةٍ أَمَامَ المَدْرَسَةِ كُلِّهَا. كَانَتْ تَجْرِبَةً رَائِعَةً، وَأَصْبَحْتُ أَكْثَرَ ثِقَةً، وَالآنَ أَتَكَلَّمُ فِي الصَّفِّ بِدُونِ خَوْفٍ.</a:t>
@@ -8378,6 +8434,7 @@
                   <a:srgbClr val="1F2A37"/>
                 </a:solidFill>
                 <a:latin typeface="Amiri" pitchFamily="2" charset="-78"/>
+                <a:ea typeface="Amiri" pitchFamily="2" charset="-78"/>
                 <a:cs typeface="Amiri" pitchFamily="2" charset="-78"/>
               </a:rPr>
               <a:t>فِي رَأْيِي، أُسْرَتِي وَأَصْدِقَائِي أَهَمُّ شَيْءٍ فِي حَيَاتِي. فِي المُسْتَقْبَلِ أُرِيدُ أَنْ أَكُونَ طَبَّاخًا مَشْهُورًا، وَسَأَفْتَحُ مَطْعَمًا مِصْرِيًّا فِي لَنْدَنَ.</a:t>
@@ -8541,11 +8598,12 @@
               <a:buNone/>
             </a:pPr>
             <a:r>
-              <a:rPr lang="en-US" sz="950" b="1" dirty="0">
+              <a:rPr lang="ar-SA" sz="950" b="1" dirty="0">
                 <a:solidFill>
                   <a:srgbClr val="FFFFFF"/>
                 </a:solidFill>
                 <a:latin typeface="Calibri" pitchFamily="34" charset="0"/>
+                <a:ea typeface="Amiri" pitchFamily="2" charset="-78"/>
                 <a:cs typeface="Amiri" pitchFamily="2" charset="-78"/>
               </a:rPr>
               <a:t>لٰكِنِّي أَسْكُنُ … مُنْذُ</a:t>
@@ -8606,11 +8664,12 @@
               <a:buNone/>
             </a:pPr>
             <a:r>
-              <a:rPr lang="en-US" sz="950" b="1" dirty="0">
+              <a:rPr lang="ar-SA" sz="950" b="1" dirty="0">
                 <a:solidFill>
                   <a:srgbClr val="FFFFFF"/>
                 </a:solidFill>
                 <a:latin typeface="Calibri" pitchFamily="34" charset="0"/>
+                <a:ea typeface="Amiri" pitchFamily="2" charset="-78"/>
                 <a:cs typeface="Amiri" pitchFamily="2" charset="-78"/>
               </a:rPr>
               <a:t>أَمَّا هِوَايَاتِي فَهِيَ</a:t>
@@ -8671,11 +8730,12 @@
               <a:buNone/>
             </a:pPr>
             <a:r>
-              <a:rPr lang="en-US" sz="950" b="1" dirty="0">
+              <a:rPr lang="ar-SA" sz="950" b="1" dirty="0">
                 <a:solidFill>
                   <a:srgbClr val="FFFFFF"/>
                 </a:solidFill>
                 <a:latin typeface="Calibri" pitchFamily="34" charset="0"/>
+                <a:ea typeface="Amiri" pitchFamily="2" charset="-78"/>
                 <a:cs typeface="Amiri" pitchFamily="2" charset="-78"/>
               </a:rPr>
               <a:t>كُنْتُ خَجُولًا</a:t>
@@ -8736,11 +8796,12 @@
               <a:buNone/>
             </a:pPr>
             <a:r>
-              <a:rPr lang="en-US" sz="950" b="1" dirty="0">
+              <a:rPr lang="ar-SA" sz="950" b="1" dirty="0">
                 <a:solidFill>
                   <a:srgbClr val="FFFFFF"/>
                 </a:solidFill>
                 <a:latin typeface="Calibri" pitchFamily="34" charset="0"/>
+                <a:ea typeface="Amiri" pitchFamily="2" charset="-78"/>
                 <a:cs typeface="Amiri" pitchFamily="2" charset="-78"/>
               </a:rPr>
               <a:t>سَأَفْتَحُ</a:t>
@@ -8874,6 +8935,7 @@
                   <a:srgbClr val="D4AF37"/>
                 </a:solidFill>
                 <a:latin typeface="Amiri" pitchFamily="2" charset="-78"/>
+                <a:ea typeface="Amiri" pitchFamily="2" charset="-78"/>
                 <a:cs typeface="Amiri" pitchFamily="2" charset="-78"/>
               </a:rPr>
               <a:t>م</a:t>
@@ -9131,6 +9193,7 @@
                   <a:srgbClr val="8A6D1E"/>
                 </a:solidFill>
                 <a:latin typeface="Amiri" pitchFamily="2" charset="-78"/>
+                <a:ea typeface="Amiri" pitchFamily="2" charset="-78"/>
                 <a:cs typeface="Amiri" pitchFamily="2" charset="-78"/>
               </a:rPr>
               <a:t>أ</a:t>
@@ -9195,6 +9258,7 @@
                   <a:srgbClr val="1B3B6F"/>
                 </a:solidFill>
                 <a:latin typeface="Amiri" pitchFamily="2" charset="-78"/>
+                <a:ea typeface="Amiri" pitchFamily="2" charset="-78"/>
                 <a:cs typeface="Amiri" pitchFamily="2" charset="-78"/>
               </a:rPr>
               <a:t>أ</a:t>
@@ -9246,6 +9310,7 @@
                   <a:srgbClr val="8A6D1E"/>
                 </a:solidFill>
                 <a:latin typeface="Amiri" pitchFamily="2" charset="-78"/>
+                <a:ea typeface="Amiri" pitchFamily="2" charset="-78"/>
                 <a:cs typeface="Amiri" pitchFamily="2" charset="-78"/>
               </a:rPr>
               <a:t>نَمُوذَجُ الإِجَابَةِ</a:t>
@@ -9359,6 +9424,7 @@
                   <a:srgbClr val="1F2A37"/>
                 </a:solidFill>
                 <a:latin typeface="Amiri" pitchFamily="2" charset="-78"/>
+                <a:ea typeface="Amiri" pitchFamily="2" charset="-78"/>
                 <a:cs typeface="Amiri" pitchFamily="2" charset="-78"/>
               </a:rPr>
               <a:t>لَوْ سَأَلْتَ أُمِّي عَنِّي، لَقَالَتْ إِنِّي «الوَلَدُ الَّذِي لَا يَجْلِسُ أَبَدًا»، وَلَوْ سَأَلْتَ أَصْدِقَائِي، لَقَالُوا إِنِّي الصَّدِيقُ الَّذِي يَسْمَعُ دَائِمًا. أَظُنُّ أَنَّ الاثْنَيْنِ صَحِيحَانِ، وَأَنَّ هٰذَا الخَلِيطَ هُوَ مَا يَجْعَلُنِي أَنَا.</a:t>
@@ -9378,6 +9444,7 @@
                   <a:srgbClr val="1F2A37"/>
                 </a:solidFill>
                 <a:latin typeface="Amiri" pitchFamily="2" charset="-78"/>
+                <a:ea typeface="Amiri" pitchFamily="2" charset="-78"/>
                 <a:cs typeface="Amiri" pitchFamily="2" charset="-78"/>
               </a:rPr>
               <a:t>اسْمِي عُمَرُ، وُلِدْتُ فِي القَاهِرَةِ، وَأَسْكُنُ فِي بَرْمِنْغْهَامَ مُنْذُ عَشْرِ سَنَوَاتٍ، فِي بَيْتٍ صَغِيرٍ أُشَارِكُ فِيهِ غُرْفَتِي مَعَ أَخِي. صَحِيحٌ أَنَّ ذٰلِكَ مُزْعِجٌ أَحْيَانًا، غَيْرَ أَنَّهُ عَلَّمَنِي الصَّبْرَ وَالتَّنْظِيمَ. أَمَّا وَقْتُ فَرَاغِي فَأَقْضِيهِ بَيْنَ مَلْعَبِ كُرَةِ القَدَمِ وَمَطْبَخِ جَدَّتِي، الَّتِي عَلَّمَتْنِي أَسْرَارَ الكُشَرِيِّ.</a:t>
@@ -9397,6 +9464,7 @@
                   <a:srgbClr val="1F2A37"/>
                 </a:solidFill>
                 <a:latin typeface="Amiri" pitchFamily="2" charset="-78"/>
+                <a:ea typeface="Amiri" pitchFamily="2" charset="-78"/>
                 <a:cs typeface="Amiri" pitchFamily="2" charset="-78"/>
               </a:rPr>
               <a:t>لَمْ أَكُنْ هٰكَذَا دَائِمًا؛ فَقَدْ كُنْتُ طِفْلًا خَجُولًا لَا يَتَكَلَّمُ فِي الصَّفِّ. وَفِي السَّنَةِ المَاضِيَةِ شَجَّعَنِي مُعَلِّمِي عَلَى الانْضِمَامِ إِلَى نَادِي المَسْرَحِ، فَوَقَفْتُ أَمَامَ ثَلَاثِمِئَةِ شَخْصٍ، وَنَسِيتُ نِصْفَ كَلَامِي، لٰكِنَّ الجُمْهُورَ صَفَّقَ لِي طَوِيلًا، وَرَأَيْتُ أُمِّي فِي الصَّفِّ الأَوَّلِ تَبْكِي مِنَ الفَرَحِ.</a:t>
@@ -9416,6 +9484,7 @@
                   <a:srgbClr val="1F2A37"/>
                 </a:solidFill>
                 <a:latin typeface="Amiri" pitchFamily="2" charset="-78"/>
+                <a:ea typeface="Amiri" pitchFamily="2" charset="-78"/>
                 <a:cs typeface="Amiri" pitchFamily="2" charset="-78"/>
               </a:rPr>
               <a:t>تِلْكَ اللَّيْلَةُ غَيَّرَتْنِي، فَأَصْبَحْتُ أُؤْمِنُ بِأَنَّ الخَوْفَ يَصْغُرُ عِنْدَمَا نُوَاجِهُهُ. فِي المُسْتَقْبَلِ سَأَدْرُسُ فُنُونَ الطَّبْخِ، وَأَحْلُمُ بِأَنْ أَفْتَحَ مَطْعَمًا يَجْمَعُ بَيْنَ مَطْبَخِ القَاهِرَةِ وَرُوحِ بَرْمِنْغْهَامَ.</a:t>
@@ -9514,11 +9583,12 @@
               <a:buNone/>
             </a:pPr>
             <a:r>
-              <a:rPr lang="en-US" sz="950" b="1" dirty="0">
+              <a:rPr lang="ar-SA" sz="950" b="1" dirty="0">
                 <a:solidFill>
                   <a:srgbClr val="FFFFFF"/>
                 </a:solidFill>
                 <a:latin typeface="Calibri" pitchFamily="34" charset="0"/>
+                <a:ea typeface="Amiri" pitchFamily="2" charset="-78"/>
                 <a:cs typeface="Amiri" pitchFamily="2" charset="-78"/>
               </a:rPr>
               <a:t>لَوْ سَأَلْتَ … لَقَالَتْ</a:t>
@@ -9579,11 +9649,12 @@
               <a:buNone/>
             </a:pPr>
             <a:r>
-              <a:rPr lang="en-US" sz="950" b="1" dirty="0">
+              <a:rPr lang="ar-SA" sz="950" b="1" dirty="0">
                 <a:solidFill>
                   <a:srgbClr val="FFFFFF"/>
                 </a:solidFill>
                 <a:latin typeface="Calibri" pitchFamily="34" charset="0"/>
+                <a:ea typeface="Amiri" pitchFamily="2" charset="-78"/>
                 <a:cs typeface="Amiri" pitchFamily="2" charset="-78"/>
               </a:rPr>
               <a:t>صَحِيحٌ أَنَّ … غَيْرَ أَنَّهُ</a:t>
@@ -9644,11 +9715,12 @@
               <a:buNone/>
             </a:pPr>
             <a:r>
-              <a:rPr lang="en-US" sz="950" b="1" dirty="0">
+              <a:rPr lang="ar-SA" sz="950" b="1" dirty="0">
                 <a:solidFill>
                   <a:srgbClr val="FFFFFF"/>
                 </a:solidFill>
                 <a:latin typeface="Calibri" pitchFamily="34" charset="0"/>
+                <a:ea typeface="Amiri" pitchFamily="2" charset="-78"/>
                 <a:cs typeface="Amiri" pitchFamily="2" charset="-78"/>
               </a:rPr>
               <a:t>لَمْ أَكُنْ هٰكَذَا دَائِمًا</a:t>
@@ -9709,11 +9781,12 @@
               <a:buNone/>
             </a:pPr>
             <a:r>
-              <a:rPr lang="en-US" sz="950" b="1" dirty="0">
+              <a:rPr lang="ar-SA" sz="950" b="1" dirty="0">
                 <a:solidFill>
                   <a:srgbClr val="FFFFFF"/>
                 </a:solidFill>
                 <a:latin typeface="Calibri" pitchFamily="34" charset="0"/>
+                <a:ea typeface="Amiri" pitchFamily="2" charset="-78"/>
                 <a:cs typeface="Amiri" pitchFamily="2" charset="-78"/>
               </a:rPr>
               <a:t>أَحْلُمُ بِأَنْ أَفْتَحَ</a:t>
@@ -9847,6 +9920,7 @@
                   <a:srgbClr val="D4AF37"/>
                 </a:solidFill>
                 <a:latin typeface="Amiri" pitchFamily="2" charset="-78"/>
+                <a:ea typeface="Amiri" pitchFamily="2" charset="-78"/>
                 <a:cs typeface="Amiri" pitchFamily="2" charset="-78"/>
               </a:rPr>
               <a:t>م</a:t>
@@ -10104,6 +10178,7 @@
                   <a:srgbClr val="8A6D1E"/>
                 </a:solidFill>
                 <a:latin typeface="Amiri" pitchFamily="2" charset="-78"/>
+                <a:ea typeface="Amiri" pitchFamily="2" charset="-78"/>
                 <a:cs typeface="Amiri" pitchFamily="2" charset="-78"/>
               </a:rPr>
               <a:t>ب</a:t>
@@ -10168,6 +10243,7 @@
                   <a:srgbClr val="1B3B6F"/>
                 </a:solidFill>
                 <a:latin typeface="Amiri" pitchFamily="2" charset="-78"/>
+                <a:ea typeface="Amiri" pitchFamily="2" charset="-78"/>
                 <a:cs typeface="Amiri" pitchFamily="2" charset="-78"/>
               </a:rPr>
               <a:t>ب</a:t>
@@ -10219,6 +10295,7 @@
                   <a:srgbClr val="8A6D1E"/>
                 </a:solidFill>
                 <a:latin typeface="Amiri" pitchFamily="2" charset="-78"/>
+                <a:ea typeface="Amiri" pitchFamily="2" charset="-78"/>
                 <a:cs typeface="Amiri" pitchFamily="2" charset="-78"/>
               </a:rPr>
               <a:t>نَمُوذَجُ الإِجَابَةِ</a:t>
@@ -10332,6 +10409,7 @@
                   <a:srgbClr val="1F2A37"/>
                 </a:solidFill>
                 <a:latin typeface="Amiri" pitchFamily="2" charset="-78"/>
+                <a:ea typeface="Amiri" pitchFamily="2" charset="-78"/>
                 <a:cs typeface="Amiri" pitchFamily="2" charset="-78"/>
               </a:rPr>
               <a:t>يَعِيشُ الشَّبَابُ اليَوْمَ فِي عَالَمٍ مُخْتَلِفٍ تَمَامًا عَنْ عَالَمِ آبَائِهِمْ؛ فَهُمْ يَتَعَلَّمُونَ وَيَلْعَبُونَ وَيَتَعَرَّفُونَ عَلَى أَصْدِقَائِهِمْ عَبْرَ الشَّاشَاتِ، وَيَحْمِلُونَ أَحْيَانًا ثَقَافَتَيْنِ أَوْ ثَلَاثًا فِي آنٍ وَاحِدٍ.</a:t>
@@ -10351,6 +10429,7 @@
                   <a:srgbClr val="1F2A37"/>
                 </a:solidFill>
                 <a:latin typeface="Amiri" pitchFamily="2" charset="-78"/>
+                <a:ea typeface="Amiri" pitchFamily="2" charset="-78"/>
                 <a:cs typeface="Amiri" pitchFamily="2" charset="-78"/>
               </a:rPr>
               <a:t>فِي المَاضِي كَانَ المُرَاهِقُ يَعْرِفُ جِيرَانَهُ كُلَّهُمْ، وَيَقْضِي وَقْتَهُ فِي الشَّارِعِ أَوِ النَّادِي، وَكَانَتْ هُوِيَّتُهُ وَاضِحَةً: ابْنُ هٰذِهِ العَائِلَةِ وَهٰذَا الحَيِّ. أَمَّا اليَوْمَ فَيَبْنِي كُلٌّ مِنَّا صُورَتَهُ عَلَى وَسَائِلِ التَّوَاصُلِ، فَيَخْتَارُ مَا يُظْهِرُهُ وَمَا يُخْفِيهِ.</a:t>
@@ -10370,6 +10449,7 @@
                   <a:srgbClr val="1F2A37"/>
                 </a:solidFill>
                 <a:latin typeface="Amiri" pitchFamily="2" charset="-78"/>
+                <a:ea typeface="Amiri" pitchFamily="2" charset="-78"/>
                 <a:cs typeface="Amiri" pitchFamily="2" charset="-78"/>
               </a:rPr>
               <a:t>لَاحَظْتُ ذٰلِكَ فِي نَفْسِي؛ فَقَبْلَ سَنَتَيْنِ كُنْتُ أَنْشُرُ صُوَرِي يَوْمِيًّا، وَأَنْتَظِرُ الإِعْجَابَاتِ بِقَلَقٍ. ثُمَّ قَرَّرْتُ أَنْ أَتَوَقَّفَ شَهْرًا كَامِلًا، فَقَرَأْتُ ثَلَاثَ رِوَايَاتٍ، وَتَعَلَّمْتُ الخِيَاطَةَ مِنْ جَدَّتِي، وَشَعَرْتُ أَنِّي أَعْرِفُ نَفْسِي أَكْثَرَ، وَأَنَّ قِيمَتِي لَا تُقَاسُ بِعَدَدِ الإِعْجَابَاتِ.</a:t>
@@ -10389,6 +10469,7 @@
                   <a:srgbClr val="1F2A37"/>
                 </a:solidFill>
                 <a:latin typeface="Amiri" pitchFamily="2" charset="-78"/>
+                <a:ea typeface="Amiri" pitchFamily="2" charset="-78"/>
                 <a:cs typeface="Amiri" pitchFamily="2" charset="-78"/>
               </a:rPr>
               <a:t>صَحِيحٌ أَنَّ التِّكْنُولُوجْيَا تَفْتَحُ لِلشَّبَابِ أَبْوَابًا لَمْ تَكُنْ مَوْجُودَةً، غَيْرَ أَنَّ الهُوِيَّةَ الحَقِيقِيَّةَ تُبْنَى فِي العَائِلَةِ وَالصَّدَاقَةِ وَالتَّجْرِبَةِ. وَلَوْ خَصَّصَ كُلُّ شَابٍّ وَقْتًا لِنَفْسِهِ بَعِيدًا عَنِ الشَّاشَةِ، لَاكْتَشَفَ أَنَّ لَدَيْهِ أَكْثَرَ مِمَّا يُظْهِرُهُ لِلْعَالَمِ.</a:t>
@@ -10487,11 +10568,12 @@
               <a:buNone/>
             </a:pPr>
             <a:r>
-              <a:rPr lang="en-US" sz="950" b="1" dirty="0">
+              <a:rPr lang="ar-SA" sz="950" b="1" dirty="0">
                 <a:solidFill>
                   <a:srgbClr val="FFFFFF"/>
                 </a:solidFill>
                 <a:latin typeface="Calibri" pitchFamily="34" charset="0"/>
+                <a:ea typeface="Amiri" pitchFamily="2" charset="-78"/>
                 <a:cs typeface="Amiri" pitchFamily="2" charset="-78"/>
               </a:rPr>
               <a:t>فِي آنٍ وَاحِدٍ</a:t>
@@ -10552,11 +10634,12 @@
               <a:buNone/>
             </a:pPr>
             <a:r>
-              <a:rPr lang="en-US" sz="950" b="1" dirty="0">
+              <a:rPr lang="ar-SA" sz="950" b="1" dirty="0">
                 <a:solidFill>
                   <a:srgbClr val="FFFFFF"/>
                 </a:solidFill>
                 <a:latin typeface="Calibri" pitchFamily="34" charset="0"/>
+                <a:ea typeface="Amiri" pitchFamily="2" charset="-78"/>
                 <a:cs typeface="Amiri" pitchFamily="2" charset="-78"/>
               </a:rPr>
               <a:t>أَمَّا اليَوْمَ فَيَبْنِي</a:t>
@@ -10617,11 +10700,12 @@
               <a:buNone/>
             </a:pPr>
             <a:r>
-              <a:rPr lang="en-US" sz="950" b="1" dirty="0">
+              <a:rPr lang="ar-SA" sz="950" b="1" dirty="0">
                 <a:solidFill>
                   <a:srgbClr val="FFFFFF"/>
                 </a:solidFill>
                 <a:latin typeface="Calibri" pitchFamily="34" charset="0"/>
+                <a:ea typeface="Amiri" pitchFamily="2" charset="-78"/>
                 <a:cs typeface="Amiri" pitchFamily="2" charset="-78"/>
               </a:rPr>
               <a:t>قَرَّرْتُ أَنْ أَتَوَقَّفَ</a:t>
@@ -10682,11 +10766,12 @@
               <a:buNone/>
             </a:pPr>
             <a:r>
-              <a:rPr lang="en-US" sz="950" b="1" dirty="0">
+              <a:rPr lang="ar-SA" sz="950" b="1" dirty="0">
                 <a:solidFill>
                   <a:srgbClr val="FFFFFF"/>
                 </a:solidFill>
                 <a:latin typeface="Calibri" pitchFamily="34" charset="0"/>
+                <a:ea typeface="Amiri" pitchFamily="2" charset="-78"/>
                 <a:cs typeface="Amiri" pitchFamily="2" charset="-78"/>
               </a:rPr>
               <a:t>لَوْ خَصَّصَ … لَاكْتَشَفَ</a:t>
@@ -10820,6 +10905,7 @@
                   <a:srgbClr val="D4AF37"/>
                 </a:solidFill>
                 <a:latin typeface="Amiri" pitchFamily="2" charset="-78"/>
+                <a:ea typeface="Amiri" pitchFamily="2" charset="-78"/>
                 <a:cs typeface="Amiri" pitchFamily="2" charset="-78"/>
               </a:rPr>
               <a:t>م</a:t>
@@ -11140,6 +11226,7 @@
                   <a:srgbClr val="8A6D1E"/>
                 </a:solidFill>
                 <a:latin typeface="Amiri" pitchFamily="2" charset="-78"/>
+                <a:ea typeface="Amiri" pitchFamily="2" charset="-78"/>
                 <a:cs typeface="Amiri" pitchFamily="2" charset="-78"/>
               </a:rPr>
               <a:t>قَيِّمْ عَمَلَكَ</a:t>
@@ -12384,6 +12471,7 @@
                   <a:srgbClr val="FFFFFF"/>
                 </a:solidFill>
                 <a:latin typeface="Amiri" pitchFamily="2" charset="-78"/>
+                <a:ea typeface="Amiri" pitchFamily="2" charset="-78"/>
                 <a:cs typeface="Amiri" pitchFamily="2" charset="-78"/>
               </a:rPr>
               <a:t>أَحْسَنْتُمْ! إِلَى اللِّقَاءِ</a:t>
@@ -12536,6 +12624,7 @@
                   <a:srgbClr val="D4AF37"/>
                 </a:solidFill>
                 <a:latin typeface="Amiri" pitchFamily="2" charset="-78"/>
+                <a:ea typeface="Amiri" pitchFamily="2" charset="-78"/>
                 <a:cs typeface="Amiri" pitchFamily="2" charset="-78"/>
               </a:rPr>
               <a:t>وَرْشَةُ التَّدْرِيبِ</a:t>
@@ -12669,6 +12758,7 @@
                   <a:srgbClr val="D4AF37"/>
                 </a:solidFill>
                 <a:latin typeface="Amiri" pitchFamily="2" charset="-78"/>
+                <a:ea typeface="Amiri" pitchFamily="2" charset="-78"/>
                 <a:cs typeface="Amiri" pitchFamily="2" charset="-78"/>
               </a:rPr>
               <a:t>م</a:t>
@@ -12989,6 +13079,7 @@
                   <a:srgbClr val="8A6D1E"/>
                 </a:solidFill>
                 <a:latin typeface="Amiri" pitchFamily="2" charset="-78"/>
+                <a:ea typeface="Amiri" pitchFamily="2" charset="-78"/>
                 <a:cs typeface="Amiri" pitchFamily="2" charset="-78"/>
               </a:rPr>
               <a:t>آدَابُ الصَّفِّ</a:t>
@@ -14520,6 +14611,7 @@
                   <a:srgbClr val="D4AF37"/>
                 </a:solidFill>
                 <a:latin typeface="Amiri" pitchFamily="2" charset="-78"/>
+                <a:ea typeface="Amiri" pitchFamily="2" charset="-78"/>
                 <a:cs typeface="Amiri" pitchFamily="2" charset="-78"/>
               </a:rPr>
               <a:t>م</a:t>
@@ -14840,6 +14932,7 @@
                   <a:srgbClr val="8A6D1E"/>
                 </a:solidFill>
                 <a:latin typeface="Amiri" pitchFamily="2" charset="-78"/>
+                <a:ea typeface="Amiri" pitchFamily="2" charset="-78"/>
                 <a:cs typeface="Amiri" pitchFamily="2" charset="-78"/>
               </a:rPr>
               <a:t>خَرِيطَةُ الوَرْشَةِ</a:t>
@@ -15154,6 +15247,7 @@
                   <a:srgbClr val="1B3B6F"/>
                 </a:solidFill>
                 <a:latin typeface="Amiri" pitchFamily="2" charset="-78"/>
+                <a:ea typeface="Amiri" pitchFamily="2" charset="-78"/>
                 <a:cs typeface="Amiri" pitchFamily="2" charset="-78"/>
               </a:rPr>
               <a:t>كَيْفَ</a:t>
@@ -15430,6 +15524,7 @@
                   <a:srgbClr val="1E6B52"/>
                 </a:solidFill>
                 <a:latin typeface="Amiri" pitchFamily="2" charset="-78"/>
+                <a:ea typeface="Amiri" pitchFamily="2" charset="-78"/>
                 <a:cs typeface="Amiri" pitchFamily="2" charset="-78"/>
               </a:rPr>
               <a:t>الاسْتِمَارَةُ</a:t>
@@ -15706,6 +15801,7 @@
                   <a:srgbClr val="1E6B52"/>
                 </a:solidFill>
                 <a:latin typeface="Amiri" pitchFamily="2" charset="-78"/>
+                <a:ea typeface="Amiri" pitchFamily="2" charset="-78"/>
                 <a:cs typeface="Amiri" pitchFamily="2" charset="-78"/>
               </a:rPr>
               <a:t>الرِّسَالَةُ</a:t>
@@ -15982,6 +16078,7 @@
                   <a:srgbClr val="1E6B52"/>
                 </a:solidFill>
                 <a:latin typeface="Amiri" pitchFamily="2" charset="-78"/>
+                <a:ea typeface="Amiri" pitchFamily="2" charset="-78"/>
                 <a:cs typeface="Amiri" pitchFamily="2" charset="-78"/>
               </a:rPr>
               <a:t>المَقَالُ</a:t>
@@ -16258,6 +16355,7 @@
                   <a:srgbClr val="8A6D1E"/>
                 </a:solidFill>
                 <a:latin typeface="Amiri" pitchFamily="2" charset="-78"/>
+                <a:ea typeface="Amiri" pitchFamily="2" charset="-78"/>
                 <a:cs typeface="Amiri" pitchFamily="2" charset="-78"/>
               </a:rPr>
               <a:t>قَيِّمْ</a:t>
@@ -16501,6 +16599,7 @@
                   <a:srgbClr val="D4AF37"/>
                 </a:solidFill>
                 <a:latin typeface="Amiri" pitchFamily="2" charset="-78"/>
+                <a:ea typeface="Amiri" pitchFamily="2" charset="-78"/>
                 <a:cs typeface="Amiri" pitchFamily="2" charset="-78"/>
               </a:rPr>
               <a:t>م</a:t>
@@ -16821,6 +16920,7 @@
                   <a:srgbClr val="8A6D1E"/>
                 </a:solidFill>
                 <a:latin typeface="Amiri" pitchFamily="2" charset="-78"/>
+                <a:ea typeface="Amiri" pitchFamily="2" charset="-78"/>
                 <a:cs typeface="Amiri" pitchFamily="2" charset="-78"/>
               </a:rPr>
               <a:t>امْتِحَانُ الكِتَابَةِ</a:t>
@@ -17445,6 +17545,7 @@
                   <a:srgbClr val="1B3B6F"/>
                 </a:solidFill>
                 <a:latin typeface="Amiri" pitchFamily="2" charset="-78"/>
+                <a:ea typeface="Amiri" pitchFamily="2" charset="-78"/>
                 <a:cs typeface="Amiri" pitchFamily="2" charset="-78"/>
               </a:rPr>
               <a:t>يَصِفُنِي أَصْدِقَائِي بِأَنِّي …</a:t>
@@ -17544,6 +17645,7 @@
                   <a:srgbClr val="1B3B6F"/>
                 </a:solidFill>
                 <a:latin typeface="Amiri" pitchFamily="2" charset="-78"/>
+                <a:ea typeface="Amiri" pitchFamily="2" charset="-78"/>
                 <a:cs typeface="Amiri" pitchFamily="2" charset="-78"/>
               </a:rPr>
               <a:t>بِالإِضَافَةِ إِلَى ذٰلِكَ … · وَلِذٰلِكَ …</a:t>
@@ -17643,6 +17745,7 @@
                   <a:srgbClr val="1B3B6F"/>
                 </a:solidFill>
                 <a:latin typeface="Amiri" pitchFamily="2" charset="-78"/>
+                <a:ea typeface="Amiri" pitchFamily="2" charset="-78"/>
                 <a:cs typeface="Amiri" pitchFamily="2" charset="-78"/>
               </a:rPr>
               <a:t>إِذَا قَبِلْتُمُونِي، فَسَأَكُونُ …</a:t>
@@ -17814,6 +17917,7 @@
                   <a:srgbClr val="D4AF37"/>
                 </a:solidFill>
                 <a:latin typeface="Amiri" pitchFamily="2" charset="-78"/>
+                <a:ea typeface="Amiri" pitchFamily="2" charset="-78"/>
                 <a:cs typeface="Amiri" pitchFamily="2" charset="-78"/>
               </a:rPr>
               <a:t>م</a:t>
@@ -18134,6 +18238,7 @@
                   <a:srgbClr val="8A6D1E"/>
                 </a:solidFill>
                 <a:latin typeface="Amiri" pitchFamily="2" charset="-78"/>
+                <a:ea typeface="Amiri" pitchFamily="2" charset="-78"/>
                 <a:cs typeface="Amiri" pitchFamily="2" charset="-78"/>
               </a:rPr>
               <a:t>طَلَبُ المُشَارَكَةِ فِي بَرْنَامَجِ التَّبَادُلِ</a:t>
@@ -18490,6 +18595,7 @@
                   <a:srgbClr val="1B3B6F"/>
                 </a:solidFill>
                 <a:latin typeface="Amiri" pitchFamily="2" charset="-78"/>
+                <a:ea typeface="Amiri" pitchFamily="2" charset="-78"/>
                 <a:cs typeface="Amiri" pitchFamily="2" charset="-78"/>
               </a:rPr>
               <a:t>الاسْمُ وَالعُمْرُ</a:t>
@@ -18734,6 +18840,7 @@
                   <a:srgbClr val="1B3B6F"/>
                 </a:solidFill>
                 <a:latin typeface="Amiri" pitchFamily="2" charset="-78"/>
+                <a:ea typeface="Amiri" pitchFamily="2" charset="-78"/>
                 <a:cs typeface="Amiri" pitchFamily="2" charset="-78"/>
               </a:rPr>
               <a:t>الجِنْسِيَّةُ وَمَكَانُ المِيلَادِ</a:t>
@@ -18978,6 +19085,7 @@
                   <a:srgbClr val="1B3B6F"/>
                 </a:solidFill>
                 <a:latin typeface="Amiri" pitchFamily="2" charset="-78"/>
+                <a:ea typeface="Amiri" pitchFamily="2" charset="-78"/>
                 <a:cs typeface="Amiri" pitchFamily="2" charset="-78"/>
               </a:rPr>
               <a:t>أَفْرَادُ الأُسْرَةِ</a:t>
@@ -19222,6 +19330,7 @@
                   <a:srgbClr val="1B3B6F"/>
                 </a:solidFill>
                 <a:latin typeface="Amiri" pitchFamily="2" charset="-78"/>
+                <a:ea typeface="Amiri" pitchFamily="2" charset="-78"/>
                 <a:cs typeface="Amiri" pitchFamily="2" charset="-78"/>
               </a:rPr>
               <a:t>نَوْعُ السَّكَنِ</a:t>
@@ -19466,6 +19575,7 @@
                   <a:srgbClr val="1B3B6F"/>
                 </a:solidFill>
                 <a:latin typeface="Amiri" pitchFamily="2" charset="-78"/>
+                <a:ea typeface="Amiri" pitchFamily="2" charset="-78"/>
                 <a:cs typeface="Amiri" pitchFamily="2" charset="-78"/>
               </a:rPr>
               <a:t>ثَلَاثُ صِفَاتٍ لِشَخْصِيَّتِكَ</a:t>
@@ -19710,6 +19820,7 @@
                   <a:srgbClr val="1B3B6F"/>
                 </a:solidFill>
                 <a:latin typeface="Amiri" pitchFamily="2" charset="-78"/>
+                <a:ea typeface="Amiri" pitchFamily="2" charset="-78"/>
                 <a:cs typeface="Amiri" pitchFamily="2" charset="-78"/>
               </a:rPr>
               <a:t>هِوَايَاتُكَ</a:t>
@@ -19954,6 +20065,7 @@
                   <a:srgbClr val="1B3B6F"/>
                 </a:solidFill>
                 <a:latin typeface="Amiri" pitchFamily="2" charset="-78"/>
+                <a:ea typeface="Amiri" pitchFamily="2" charset="-78"/>
                 <a:cs typeface="Amiri" pitchFamily="2" charset="-78"/>
               </a:rPr>
               <a:t>تَجْرِبَةُ سَفَرٍ سَابِقَةٌ</a:t>
@@ -20133,6 +20245,7 @@
                   <a:srgbClr val="1B3B6F"/>
                 </a:solidFill>
                 <a:latin typeface="Amiri" pitchFamily="2" charset="-78"/>
+                <a:ea typeface="Amiri" pitchFamily="2" charset="-78"/>
                 <a:cs typeface="Amiri" pitchFamily="2" charset="-78"/>
               </a:rPr>
               <a:t>جُمْلَةٌ: مَاذَا سَتُقَدِّمُ لِلْأُسْرَةِ المُضِيفَةِ؟</a:t>
@@ -20342,6 +20455,7 @@
                   <a:srgbClr val="D4AF37"/>
                 </a:solidFill>
                 <a:latin typeface="Amiri" pitchFamily="2" charset="-78"/>
+                <a:ea typeface="Amiri" pitchFamily="2" charset="-78"/>
                 <a:cs typeface="Amiri" pitchFamily="2" charset="-78"/>
               </a:rPr>
               <a:t>م</a:t>
@@ -20662,6 +20776,7 @@
                   <a:srgbClr val="8A6D1E"/>
                 </a:solidFill>
                 <a:latin typeface="Amiri" pitchFamily="2" charset="-78"/>
+                <a:ea typeface="Amiri" pitchFamily="2" charset="-78"/>
                 <a:cs typeface="Amiri" pitchFamily="2" charset="-78"/>
               </a:rPr>
               <a:t>نَمُوذَجُ الإِجَابَةِ</a:t>
@@ -20980,6 +21095,7 @@
                   <a:srgbClr val="1B3B6F"/>
                 </a:solidFill>
                 <a:latin typeface="Amiri" pitchFamily="2" charset="-78"/>
+                <a:ea typeface="Amiri" pitchFamily="2" charset="-78"/>
                 <a:cs typeface="Amiri" pitchFamily="2" charset="-78"/>
               </a:rPr>
               <a:t>رِيمُ أَحْمَدُ، سِتَّ عَشْرَةَ سَنَةً</a:t>
@@ -21018,6 +21134,7 @@
                   <a:srgbClr val="1B3B6F"/>
                 </a:solidFill>
                 <a:latin typeface="Amiri" pitchFamily="2" charset="-78"/>
+                <a:ea typeface="Amiri" pitchFamily="2" charset="-78"/>
                 <a:cs typeface="Amiri" pitchFamily="2" charset="-78"/>
               </a:rPr>
               <a:t>الاسْمُ وَالعُمْرُ</a:t>
@@ -21159,6 +21276,7 @@
                   <a:srgbClr val="1B3B6F"/>
                 </a:solidFill>
                 <a:latin typeface="Amiri" pitchFamily="2" charset="-78"/>
+                <a:ea typeface="Amiri" pitchFamily="2" charset="-78"/>
                 <a:cs typeface="Amiri" pitchFamily="2" charset="-78"/>
               </a:rPr>
               <a:t>بِرِيطَانِيَّةٌ، لَنْدَنُ</a:t>
@@ -21197,6 +21315,7 @@
                   <a:srgbClr val="1B3B6F"/>
                 </a:solidFill>
                 <a:latin typeface="Amiri" pitchFamily="2" charset="-78"/>
+                <a:ea typeface="Amiri" pitchFamily="2" charset="-78"/>
                 <a:cs typeface="Amiri" pitchFamily="2" charset="-78"/>
               </a:rPr>
               <a:t>الجِنْسِيَّةُ وَمَكَانُ المِيلَادِ</a:t>
@@ -21338,6 +21457,7 @@
                   <a:srgbClr val="1B3B6F"/>
                 </a:solidFill>
                 <a:latin typeface="Amiri" pitchFamily="2" charset="-78"/>
+                <a:ea typeface="Amiri" pitchFamily="2" charset="-78"/>
                 <a:cs typeface="Amiri" pitchFamily="2" charset="-78"/>
               </a:rPr>
               <a:t>أَبِي وَأُمِّي وَأَخٌ صَغِيرٌ</a:t>
@@ -21376,6 +21496,7 @@
                   <a:srgbClr val="1B3B6F"/>
                 </a:solidFill>
                 <a:latin typeface="Amiri" pitchFamily="2" charset="-78"/>
+                <a:ea typeface="Amiri" pitchFamily="2" charset="-78"/>
                 <a:cs typeface="Amiri" pitchFamily="2" charset="-78"/>
               </a:rPr>
               <a:t>أَفْرَادُ الأُسْرَةِ</a:t>
@@ -21517,6 +21638,7 @@
                   <a:srgbClr val="1B3B6F"/>
                 </a:solidFill>
                 <a:latin typeface="Amiri" pitchFamily="2" charset="-78"/>
+                <a:ea typeface="Amiri" pitchFamily="2" charset="-78"/>
                 <a:cs typeface="Amiri" pitchFamily="2" charset="-78"/>
               </a:rPr>
               <a:t>شَقَّةٌ فِي الطَّابِقِ الثَّالِثِ</a:t>
@@ -21555,6 +21677,7 @@
                   <a:srgbClr val="1B3B6F"/>
                 </a:solidFill>
                 <a:latin typeface="Amiri" pitchFamily="2" charset="-78"/>
+                <a:ea typeface="Amiri" pitchFamily="2" charset="-78"/>
                 <a:cs typeface="Amiri" pitchFamily="2" charset="-78"/>
               </a:rPr>
               <a:t>نَوْعُ السَّكَنِ</a:t>
@@ -21696,6 +21819,7 @@
                   <a:srgbClr val="1B3B6F"/>
                 </a:solidFill>
                 <a:latin typeface="Amiri" pitchFamily="2" charset="-78"/>
+                <a:ea typeface="Amiri" pitchFamily="2" charset="-78"/>
                 <a:cs typeface="Amiri" pitchFamily="2" charset="-78"/>
               </a:rPr>
               <a:t>مَرِحَةٌ وَمُنَظَّمَةٌ وَصَبُورَةٌ</a:t>
@@ -21734,6 +21858,7 @@
                   <a:srgbClr val="1B3B6F"/>
                 </a:solidFill>
                 <a:latin typeface="Amiri" pitchFamily="2" charset="-78"/>
+                <a:ea typeface="Amiri" pitchFamily="2" charset="-78"/>
                 <a:cs typeface="Amiri" pitchFamily="2" charset="-78"/>
               </a:rPr>
               <a:t>ثَلَاثُ صِفَاتٍ لِشَخْصِيَّتِكَ</a:t>
@@ -21875,6 +22000,7 @@
                   <a:srgbClr val="1B3B6F"/>
                 </a:solidFill>
                 <a:latin typeface="Amiri" pitchFamily="2" charset="-78"/>
+                <a:ea typeface="Amiri" pitchFamily="2" charset="-78"/>
                 <a:cs typeface="Amiri" pitchFamily="2" charset="-78"/>
               </a:rPr>
               <a:t>الرَّسْمُ وَالسِّبَاحَةُ</a:t>
@@ -21913,6 +22039,7 @@
                   <a:srgbClr val="1B3B6F"/>
                 </a:solidFill>
                 <a:latin typeface="Amiri" pitchFamily="2" charset="-78"/>
+                <a:ea typeface="Amiri" pitchFamily="2" charset="-78"/>
                 <a:cs typeface="Amiri" pitchFamily="2" charset="-78"/>
               </a:rPr>
               <a:t>هِوَايَاتُكَ</a:t>
@@ -22054,6 +22181,7 @@
                   <a:srgbClr val="1B3B6F"/>
                 </a:solidFill>
                 <a:latin typeface="Amiri" pitchFamily="2" charset="-78"/>
+                <a:ea typeface="Amiri" pitchFamily="2" charset="-78"/>
                 <a:cs typeface="Amiri" pitchFamily="2" charset="-78"/>
               </a:rPr>
               <a:t>زِيَارَةُ المَغْرِبِ فِي الصَّيْفِ المَاضِي</a:t>
@@ -22092,6 +22220,7 @@
                   <a:srgbClr val="1B3B6F"/>
                 </a:solidFill>
                 <a:latin typeface="Amiri" pitchFamily="2" charset="-78"/>
+                <a:ea typeface="Amiri" pitchFamily="2" charset="-78"/>
                 <a:cs typeface="Amiri" pitchFamily="2" charset="-78"/>
               </a:rPr>
               <a:t>تَجْرِبَةُ سَفَرٍ سَابِقَةٌ</a:t>
@@ -22233,6 +22362,7 @@
                   <a:srgbClr val="1B3B6F"/>
                 </a:solidFill>
                 <a:latin typeface="Amiri" pitchFamily="2" charset="-78"/>
+                <a:ea typeface="Amiri" pitchFamily="2" charset="-78"/>
                 <a:cs typeface="Amiri" pitchFamily="2" charset="-78"/>
               </a:rPr>
               <a:t>سَأُسَاعِدُ فِي البَيْتِ، وَسَأُعَلِّمُ أَوْلَادَهُمُ الإِنْجِلِيزِيَّةَ.</a:t>
@@ -22271,6 +22401,7 @@
                   <a:srgbClr val="1B3B6F"/>
                 </a:solidFill>
                 <a:latin typeface="Amiri" pitchFamily="2" charset="-78"/>
+                <a:ea typeface="Amiri" pitchFamily="2" charset="-78"/>
                 <a:cs typeface="Amiri" pitchFamily="2" charset="-78"/>
               </a:rPr>
               <a:t>جُمْلَةٌ: مَاذَا سَتُقَدِّمُ لِلْأُسْرَةِ المُضِيفَةِ؟</a:t>
@@ -22480,6 +22611,7 @@
                   <a:srgbClr val="D4AF37"/>
                 </a:solidFill>
                 <a:latin typeface="Amiri" pitchFamily="2" charset="-78"/>
+                <a:ea typeface="Amiri" pitchFamily="2" charset="-78"/>
                 <a:cs typeface="Amiri" pitchFamily="2" charset="-78"/>
               </a:rPr>
               <a:t>م</a:t>
@@ -22800,6 +22932,7 @@
                   <a:srgbClr val="8A6D1E"/>
                 </a:solidFill>
                 <a:latin typeface="Amiri" pitchFamily="2" charset="-78"/>
+                <a:ea typeface="Amiri" pitchFamily="2" charset="-78"/>
                 <a:cs typeface="Amiri" pitchFamily="2" charset="-78"/>
               </a:rPr>
               <a:t>رِسَالَةُ تَقْدِيمٍ</a:t>
@@ -23275,6 +23408,7 @@
                   <a:srgbClr val="1B3B6F"/>
                 </a:solidFill>
                 <a:latin typeface="Amiri" pitchFamily="2" charset="-78"/>
+                <a:ea typeface="Amiri" pitchFamily="2" charset="-78"/>
                 <a:cs typeface="Amiri" pitchFamily="2" charset="-78"/>
               </a:rPr>
               <a:t>اسْمِي … وَأَسْكُنُ فِي … مَعَ …</a:t>
@@ -23351,6 +23485,7 @@
                   <a:srgbClr val="1B3B6F"/>
                 </a:solidFill>
                 <a:latin typeface="Amiri" pitchFamily="2" charset="-78"/>
+                <a:ea typeface="Amiri" pitchFamily="2" charset="-78"/>
                 <a:cs typeface="Amiri" pitchFamily="2" charset="-78"/>
               </a:rPr>
               <a:t>يَصِفُنِي أَصْدِقَائِي بِأَنِّي …</a:t>
@@ -23427,6 +23562,7 @@
                   <a:srgbClr val="1B3B6F"/>
                 </a:solidFill>
                 <a:latin typeface="Amiri" pitchFamily="2" charset="-78"/>
+                <a:ea typeface="Amiri" pitchFamily="2" charset="-78"/>
                 <a:cs typeface="Amiri" pitchFamily="2" charset="-78"/>
               </a:rPr>
               <a:t>فِي الصَّيْفِ المَاضِي … وَلِذٰلِكَ …</a:t>
@@ -23503,6 +23639,7 @@
                   <a:srgbClr val="1B3B6F"/>
                 </a:solidFill>
                 <a:latin typeface="Amiri" pitchFamily="2" charset="-78"/>
+                <a:ea typeface="Amiri" pitchFamily="2" charset="-78"/>
                 <a:cs typeface="Amiri" pitchFamily="2" charset="-78"/>
               </a:rPr>
               <a:t>إِذَا قَبِلْتُمُونِي، سَأُسَاعِدُ …</a:t>
@@ -23674,6 +23811,7 @@
                   <a:srgbClr val="D4AF37"/>
                 </a:solidFill>
                 <a:latin typeface="Amiri" pitchFamily="2" charset="-78"/>
+                <a:ea typeface="Amiri" pitchFamily="2" charset="-78"/>
                 <a:cs typeface="Amiri" pitchFamily="2" charset="-78"/>
               </a:rPr>
               <a:t>م</a:t>
@@ -23994,6 +24132,7 @@
                   <a:srgbClr val="8A6D1E"/>
                 </a:solidFill>
                 <a:latin typeface="Amiri" pitchFamily="2" charset="-78"/>
+                <a:ea typeface="Amiri" pitchFamily="2" charset="-78"/>
                 <a:cs typeface="Amiri" pitchFamily="2" charset="-78"/>
               </a:rPr>
               <a:t>نَصُّ السُّؤَالِ</a:t>
@@ -24274,6 +24413,7 @@
                   <a:srgbClr val="1B3B6F"/>
                 </a:solidFill>
                 <a:latin typeface="Amiri" pitchFamily="2" charset="-78"/>
+                <a:ea typeface="Amiri" pitchFamily="2" charset="-78"/>
                 <a:cs typeface="Amiri" pitchFamily="2" charset="-78"/>
               </a:rPr>
               <a:t>تَتَقَدَّمِينَ لِبَرْنَامَجِ تَبَادُلٍ فِي بَلَدٍ عَرَبِيٍّ. اكْتُبِي رِسَالَةً (٨٠–٩٠ كَلِمَةً).</a:t>
@@ -24415,6 +24555,7 @@
                   <a:srgbClr val="1B3B6F"/>
                 </a:solidFill>
                 <a:latin typeface="Amiri" pitchFamily="2" charset="-78"/>
+                <a:ea typeface="Amiri" pitchFamily="2" charset="-78"/>
                 <a:cs typeface="Amiri" pitchFamily="2" charset="-78"/>
               </a:rPr>
               <a:t>عَرِّفِي بِنَفْسِكِ وَأُسْرَتِكِ وَمَكَانِ سَكَنِكِ.</a:t>
@@ -24556,6 +24697,7 @@
                   <a:srgbClr val="1B3B6F"/>
                 </a:solidFill>
                 <a:latin typeface="Amiri" pitchFamily="2" charset="-78"/>
+                <a:ea typeface="Amiri" pitchFamily="2" charset="-78"/>
                 <a:cs typeface="Amiri" pitchFamily="2" charset="-78"/>
               </a:rPr>
               <a:t>صِفِي شَخْصِيَّتَكِ وَهِوَايَاتِكِ.</a:t>
@@ -24697,6 +24839,7 @@
                   <a:srgbClr val="1B3B6F"/>
                 </a:solidFill>
                 <a:latin typeface="Amiri" pitchFamily="2" charset="-78"/>
+                <a:ea typeface="Amiri" pitchFamily="2" charset="-78"/>
                 <a:cs typeface="Amiri" pitchFamily="2" charset="-78"/>
               </a:rPr>
               <a:t>مَا التَّجْرِبَةُ الَّتِي جَعَلَتْكِ تُرِيدِينَ المُشَارَكَةَ؟</a:t>
@@ -24838,6 +24981,7 @@
                   <a:srgbClr val="1B3B6F"/>
                 </a:solidFill>
                 <a:latin typeface="Amiri" pitchFamily="2" charset="-78"/>
+                <a:ea typeface="Amiri" pitchFamily="2" charset="-78"/>
                 <a:cs typeface="Amiri" pitchFamily="2" charset="-78"/>
               </a:rPr>
               <a:t>مَاذَا سَتَفْعَلِينَ إِذَا قَبِلُوكِ؟</a:t>
@@ -25047,6 +25191,7 @@
                   <a:srgbClr val="D4AF37"/>
                 </a:solidFill>
                 <a:latin typeface="Amiri" pitchFamily="2" charset="-78"/>
+                <a:ea typeface="Amiri" pitchFamily="2" charset="-78"/>
                 <a:cs typeface="Amiri" pitchFamily="2" charset="-78"/>
               </a:rPr>
               <a:t>م</a:t>
@@ -25367,6 +25512,7 @@
                   <a:srgbClr val="8A6D1E"/>
                 </a:solidFill>
                 <a:latin typeface="Amiri" pitchFamily="2" charset="-78"/>
+                <a:ea typeface="Amiri" pitchFamily="2" charset="-78"/>
                 <a:cs typeface="Amiri" pitchFamily="2" charset="-78"/>
               </a:rPr>
               <a:t>قَوَالِبُ الكِتَابَةِ</a:t>
@@ -25647,6 +25793,7 @@
                   <a:srgbClr val="1B3B6F"/>
                 </a:solidFill>
                 <a:latin typeface="Amiri" pitchFamily="2" charset="-78"/>
+                <a:ea typeface="Amiri" pitchFamily="2" charset="-78"/>
                 <a:cs typeface="Amiri" pitchFamily="2" charset="-78"/>
               </a:rPr>
               <a:t>السَّلَامُ عَلَيْكُمْ،</a:t>
@@ -25853,6 +26000,7 @@
                   <a:srgbClr val="1B3B6F"/>
                 </a:solidFill>
                 <a:latin typeface="Amiri" pitchFamily="2" charset="-78"/>
+                <a:ea typeface="Amiri" pitchFamily="2" charset="-78"/>
                 <a:cs typeface="Amiri" pitchFamily="2" charset="-78"/>
               </a:rPr>
               <a:t>اسْمِي ______ ، وَعُمْرِي ______ ، وَأَسْكُنُ فِي ______ مَعَ ______ .</a:t>
@@ -26059,6 +26207,7 @@
                   <a:srgbClr val="1B3B6F"/>
                 </a:solidFill>
                 <a:latin typeface="Amiri" pitchFamily="2" charset="-78"/>
+                <a:ea typeface="Amiri" pitchFamily="2" charset="-78"/>
                 <a:cs typeface="Amiri" pitchFamily="2" charset="-78"/>
               </a:rPr>
               <a:t>أَنَا ______ وَ ______ ، وَأُحِبُّ ______ .</a:t>
@@ -26265,6 +26414,7 @@
                   <a:srgbClr val="1B3B6F"/>
                 </a:solidFill>
                 <a:latin typeface="Amiri" pitchFamily="2" charset="-78"/>
+                <a:ea typeface="Amiri" pitchFamily="2" charset="-78"/>
                 <a:cs typeface="Amiri" pitchFamily="2" charset="-78"/>
               </a:rPr>
               <a:t>فِي ______ المَاضِي ______ ، لِذٰلِكَ أُرِيدُ أَنْ أُشَارِكَ.</a:t>
@@ -26471,6 +26621,7 @@
                   <a:srgbClr val="1B3B6F"/>
                 </a:solidFill>
                 <a:latin typeface="Amiri" pitchFamily="2" charset="-78"/>
+                <a:ea typeface="Amiri" pitchFamily="2" charset="-78"/>
                 <a:cs typeface="Amiri" pitchFamily="2" charset="-78"/>
               </a:rPr>
               <a:t>إِذَا قَبِلْتُمُونِي، سَأُسَاعِدُ ______ وَسَأَتَعَلَّمُ ______ .</a:t>
@@ -26677,6 +26828,7 @@
                   <a:srgbClr val="1B3B6F"/>
                 </a:solidFill>
                 <a:latin typeface="Amiri" pitchFamily="2" charset="-78"/>
+                <a:ea typeface="Amiri" pitchFamily="2" charset="-78"/>
                 <a:cs typeface="Amiri" pitchFamily="2" charset="-78"/>
               </a:rPr>
               <a:t>مَعَ الشُّكْرِ، ______</a:t>
@@ -26916,13 +27068,9 @@
     <a:fontScheme name="Office">
       <a:majorFont>
         <a:latin typeface="Calibri Light" panose="020F0302020204030204"/>
-        <a:ea typeface=""/>
-        <a:cs typeface=""/>
-        <a:font script="Jpan" typeface="游ゴシック Light"/>
-        <a:font script="Hang" typeface="맑은 고딕"/>
-        <a:font script="Hans" typeface="等线 Light"/>
-        <a:font script="Hant" typeface="新細明體"/>
-        <a:font script="Arab" typeface="Times New Roman"/>
+        <a:ea typeface="Amiri" pitchFamily="2" charset="-78"/>
+        <a:cs typeface="Amiri" pitchFamily="2" charset="-78"/>
+        <a:font script="Arab" typeface="Amiri"/>
         <a:font script="Hebr" typeface="Times New Roman"/>
         <a:font script="Thai" typeface="Angsana New"/>
         <a:font script="Ethi" typeface="Nyala"/>
@@ -26968,13 +27116,9 @@
       </a:majorFont>
       <a:minorFont>
         <a:latin typeface="Calibri" panose="020F0502020204030204"/>
-        <a:ea typeface=""/>
-        <a:cs typeface=""/>
-        <a:font script="Jpan" typeface="游ゴシック"/>
-        <a:font script="Hang" typeface="맑은 고딕"/>
-        <a:font script="Hans" typeface="等线"/>
-        <a:font script="Hant" typeface="新細明體"/>
-        <a:font script="Arab" typeface="Arial"/>
+        <a:ea typeface="Amiri" pitchFamily="2" charset="-78"/>
+        <a:cs typeface="Amiri" pitchFamily="2" charset="-78"/>
+        <a:font script="Arab" typeface="Amiri"/>
         <a:font script="Hebr" typeface="Arial"/>
         <a:font script="Thai" typeface="Cordia New"/>
         <a:font script="Ethi" typeface="Nyala"/>

--- a/Topic_B/Exam_Practice/TB-L11_Writing_Workshop_Topic_B_Speaking_and_Writing_Workshop.pptx
+++ b/Topic_B/Exam_Practice/TB-L11_Writing_Workshop_Topic_B_Speaking_and_Writing_Workshop.pptx
@@ -3848,7 +3848,7 @@
                 <a:solidFill>
                   <a:srgbClr val="FFFFFF"/>
                 </a:solidFill>
-                <a:latin typeface="Calibri" pitchFamily="34" charset="0"/>
+                <a:latin typeface="Amiri" pitchFamily="2" charset="-78"/>
                 <a:ea typeface="Amiri" pitchFamily="2" charset="-78"/>
                 <a:cs typeface="Amiri" pitchFamily="2" charset="-78"/>
               </a:rPr>
@@ -3914,7 +3914,7 @@
                 <a:solidFill>
                   <a:srgbClr val="FFFFFF"/>
                 </a:solidFill>
-                <a:latin typeface="Calibri" pitchFamily="34" charset="0"/>
+                <a:latin typeface="Amiri" pitchFamily="2" charset="-78"/>
                 <a:ea typeface="Amiri" pitchFamily="2" charset="-78"/>
                 <a:cs typeface="Amiri" pitchFamily="2" charset="-78"/>
               </a:rPr>
@@ -3980,7 +3980,7 @@
                 <a:solidFill>
                   <a:srgbClr val="FFFFFF"/>
                 </a:solidFill>
-                <a:latin typeface="Calibri" pitchFamily="34" charset="0"/>
+                <a:latin typeface="Amiri" pitchFamily="2" charset="-78"/>
                 <a:ea typeface="Amiri" pitchFamily="2" charset="-78"/>
                 <a:cs typeface="Amiri" pitchFamily="2" charset="-78"/>
               </a:rPr>
@@ -4046,7 +4046,7 @@
                 <a:solidFill>
                   <a:srgbClr val="FFFFFF"/>
                 </a:solidFill>
-                <a:latin typeface="Calibri" pitchFamily="34" charset="0"/>
+                <a:latin typeface="Amiri" pitchFamily="2" charset="-78"/>
                 <a:ea typeface="Amiri" pitchFamily="2" charset="-78"/>
                 <a:cs typeface="Amiri" pitchFamily="2" charset="-78"/>
               </a:rPr>
@@ -4844,7 +4844,7 @@
                 <a:solidFill>
                   <a:srgbClr val="FFFFFF"/>
                 </a:solidFill>
-                <a:latin typeface="Calibri" pitchFamily="34" charset="0"/>
+                <a:latin typeface="Amiri" pitchFamily="2" charset="-78"/>
                 <a:ea typeface="Amiri" pitchFamily="2" charset="-78"/>
                 <a:cs typeface="Amiri" pitchFamily="2" charset="-78"/>
               </a:rPr>
@@ -4910,7 +4910,7 @@
                 <a:solidFill>
                   <a:srgbClr val="FFFFFF"/>
                 </a:solidFill>
-                <a:latin typeface="Calibri" pitchFamily="34" charset="0"/>
+                <a:latin typeface="Amiri" pitchFamily="2" charset="-78"/>
                 <a:ea typeface="Amiri" pitchFamily="2" charset="-78"/>
                 <a:cs typeface="Amiri" pitchFamily="2" charset="-78"/>
               </a:rPr>
@@ -4976,7 +4976,7 @@
                 <a:solidFill>
                   <a:srgbClr val="FFFFFF"/>
                 </a:solidFill>
-                <a:latin typeface="Calibri" pitchFamily="34" charset="0"/>
+                <a:latin typeface="Amiri" pitchFamily="2" charset="-78"/>
                 <a:ea typeface="Amiri" pitchFamily="2" charset="-78"/>
                 <a:cs typeface="Amiri" pitchFamily="2" charset="-78"/>
               </a:rPr>
@@ -5042,7 +5042,7 @@
                 <a:solidFill>
                   <a:srgbClr val="FFFFFF"/>
                 </a:solidFill>
-                <a:latin typeface="Calibri" pitchFamily="34" charset="0"/>
+                <a:latin typeface="Amiri" pitchFamily="2" charset="-78"/>
                 <a:ea typeface="Amiri" pitchFamily="2" charset="-78"/>
                 <a:cs typeface="Amiri" pitchFamily="2" charset="-78"/>
               </a:rPr>
@@ -8602,7 +8602,7 @@
                 <a:solidFill>
                   <a:srgbClr val="FFFFFF"/>
                 </a:solidFill>
-                <a:latin typeface="Calibri" pitchFamily="34" charset="0"/>
+                <a:latin typeface="Amiri" pitchFamily="2" charset="-78"/>
                 <a:ea typeface="Amiri" pitchFamily="2" charset="-78"/>
                 <a:cs typeface="Amiri" pitchFamily="2" charset="-78"/>
               </a:rPr>
@@ -8668,7 +8668,7 @@
                 <a:solidFill>
                   <a:srgbClr val="FFFFFF"/>
                 </a:solidFill>
-                <a:latin typeface="Calibri" pitchFamily="34" charset="0"/>
+                <a:latin typeface="Amiri" pitchFamily="2" charset="-78"/>
                 <a:ea typeface="Amiri" pitchFamily="2" charset="-78"/>
                 <a:cs typeface="Amiri" pitchFamily="2" charset="-78"/>
               </a:rPr>
@@ -8734,7 +8734,7 @@
                 <a:solidFill>
                   <a:srgbClr val="FFFFFF"/>
                 </a:solidFill>
-                <a:latin typeface="Calibri" pitchFamily="34" charset="0"/>
+                <a:latin typeface="Amiri" pitchFamily="2" charset="-78"/>
                 <a:ea typeface="Amiri" pitchFamily="2" charset="-78"/>
                 <a:cs typeface="Amiri" pitchFamily="2" charset="-78"/>
               </a:rPr>
@@ -8800,7 +8800,7 @@
                 <a:solidFill>
                   <a:srgbClr val="FFFFFF"/>
                 </a:solidFill>
-                <a:latin typeface="Calibri" pitchFamily="34" charset="0"/>
+                <a:latin typeface="Amiri" pitchFamily="2" charset="-78"/>
                 <a:ea typeface="Amiri" pitchFamily="2" charset="-78"/>
                 <a:cs typeface="Amiri" pitchFamily="2" charset="-78"/>
               </a:rPr>
@@ -9587,7 +9587,7 @@
                 <a:solidFill>
                   <a:srgbClr val="FFFFFF"/>
                 </a:solidFill>
-                <a:latin typeface="Calibri" pitchFamily="34" charset="0"/>
+                <a:latin typeface="Amiri" pitchFamily="2" charset="-78"/>
                 <a:ea typeface="Amiri" pitchFamily="2" charset="-78"/>
                 <a:cs typeface="Amiri" pitchFamily="2" charset="-78"/>
               </a:rPr>
@@ -9653,7 +9653,7 @@
                 <a:solidFill>
                   <a:srgbClr val="FFFFFF"/>
                 </a:solidFill>
-                <a:latin typeface="Calibri" pitchFamily="34" charset="0"/>
+                <a:latin typeface="Amiri" pitchFamily="2" charset="-78"/>
                 <a:ea typeface="Amiri" pitchFamily="2" charset="-78"/>
                 <a:cs typeface="Amiri" pitchFamily="2" charset="-78"/>
               </a:rPr>
@@ -9719,7 +9719,7 @@
                 <a:solidFill>
                   <a:srgbClr val="FFFFFF"/>
                 </a:solidFill>
-                <a:latin typeface="Calibri" pitchFamily="34" charset="0"/>
+                <a:latin typeface="Amiri" pitchFamily="2" charset="-78"/>
                 <a:ea typeface="Amiri" pitchFamily="2" charset="-78"/>
                 <a:cs typeface="Amiri" pitchFamily="2" charset="-78"/>
               </a:rPr>
@@ -9785,7 +9785,7 @@
                 <a:solidFill>
                   <a:srgbClr val="FFFFFF"/>
                 </a:solidFill>
-                <a:latin typeface="Calibri" pitchFamily="34" charset="0"/>
+                <a:latin typeface="Amiri" pitchFamily="2" charset="-78"/>
                 <a:ea typeface="Amiri" pitchFamily="2" charset="-78"/>
                 <a:cs typeface="Amiri" pitchFamily="2" charset="-78"/>
               </a:rPr>
@@ -10572,7 +10572,7 @@
                 <a:solidFill>
                   <a:srgbClr val="FFFFFF"/>
                 </a:solidFill>
-                <a:latin typeface="Calibri" pitchFamily="34" charset="0"/>
+                <a:latin typeface="Amiri" pitchFamily="2" charset="-78"/>
                 <a:ea typeface="Amiri" pitchFamily="2" charset="-78"/>
                 <a:cs typeface="Amiri" pitchFamily="2" charset="-78"/>
               </a:rPr>
@@ -10638,7 +10638,7 @@
                 <a:solidFill>
                   <a:srgbClr val="FFFFFF"/>
                 </a:solidFill>
-                <a:latin typeface="Calibri" pitchFamily="34" charset="0"/>
+                <a:latin typeface="Amiri" pitchFamily="2" charset="-78"/>
                 <a:ea typeface="Amiri" pitchFamily="2" charset="-78"/>
                 <a:cs typeface="Amiri" pitchFamily="2" charset="-78"/>
               </a:rPr>
@@ -10704,7 +10704,7 @@
                 <a:solidFill>
                   <a:srgbClr val="FFFFFF"/>
                 </a:solidFill>
-                <a:latin typeface="Calibri" pitchFamily="34" charset="0"/>
+                <a:latin typeface="Amiri" pitchFamily="2" charset="-78"/>
                 <a:ea typeface="Amiri" pitchFamily="2" charset="-78"/>
                 <a:cs typeface="Amiri" pitchFamily="2" charset="-78"/>
               </a:rPr>
@@ -10770,7 +10770,7 @@
                 <a:solidFill>
                   <a:srgbClr val="FFFFFF"/>
                 </a:solidFill>
-                <a:latin typeface="Calibri" pitchFamily="34" charset="0"/>
+                <a:latin typeface="Amiri" pitchFamily="2" charset="-78"/>
                 <a:ea typeface="Amiri" pitchFamily="2" charset="-78"/>
                 <a:cs typeface="Amiri" pitchFamily="2" charset="-78"/>
               </a:rPr>
